--- a/docs/빈필드시뮬레이터_최종발표.pptx
+++ b/docs/빈필드시뮬레이터_최종발표.pptx
@@ -124,7 +124,7 @@
   <p:extLst>
     <p:ext uri="{521415D9-36F7-43E2-AB2F-B90AF26B5E84}">
       <p14:sectionLst xmlns:p14="http://schemas.microsoft.com/office/powerpoint/2010/main">
-        <p14:section name="개요" id="{ce8527aa-44ea-2e2d-83e2-74ec3c3eb6d6}">
+        <p14:section name="개요" id="{be9c3d50-261b-6b18-05f2-c60bdd73a2b1}">
           <p14:sldIdLst>
             <p14:sldId id="256"/>
             <p14:sldId id="257"/>
@@ -132,13 +132,13 @@
             <p14:sldId id="259"/>
           </p14:sldIdLst>
         </p14:section>
-        <p14:section name="고객 정의" id="{42f95527-f783-3a14-9aa4-ce385359b7a9}">
+        <p14:section name="고객 정의" id="{c6f18c84-4416-de9b-04da-fd7a259cb6fb}">
           <p14:sldIdLst>
             <p14:sldId id="260"/>
             <p14:sldId id="261"/>
           </p14:sldIdLst>
         </p14:section>
-        <p14:section name="가치제안 캔버스" id="{40700e86-d903-1ac2-7408-4ebe88620305}">
+        <p14:section name="가치제안 캔버스" id="{3a671c22-9cc1-5a3c-46ed-c2d95b5d3930}">
           <p14:sldIdLst>
             <p14:sldId id="262"/>
             <p14:sldId id="263"/>
@@ -146,20 +146,20 @@
             <p14:sldId id="265"/>
           </p14:sldIdLst>
         </p14:section>
-        <p14:section name="가설 검증" id="{572e7d6c-3bb1-e1ae-414c-e5ec38dfcba5}">
+        <p14:section name="가설 검증" id="{028fa026-0d1f-987f-e003-c30fca7688ae}">
           <p14:sldIdLst>
             <p14:sldId id="266"/>
             <p14:sldId id="267"/>
             <p14:sldId id="268"/>
           </p14:sldIdLst>
         </p14:section>
-        <p14:section name="MVP" id="{fb6825dc-f5eb-3883-c149-8a194f2155db}">
+        <p14:section name="MVP" id="{320324a2-120e-dbfe-c8a3-74f195dc4abd}">
           <p14:sldIdLst>
             <p14:sldId id="269"/>
             <p14:sldId id="270"/>
           </p14:sldIdLst>
         </p14:section>
-        <p14:section name="비즈니스 모델과 다음 단계" id="{c7b5a50c-f9c8-2a19-0cfc-78d193880851}">
+        <p14:section name="비즈니스 모델과 다음 단계" id="{6995cd3a-abb8-98df-1339-a164ba9ead7b}">
           <p14:sldIdLst>
             <p14:sldId id="271"/>
             <p14:sldId id="272"/>
@@ -13413,7 +13413,24 @@
                 <a:ea typeface="Freesentation 4 Regular" pitchFamily="34" charset="-122"/>
                 <a:cs typeface="Freesentation 4 Regular" pitchFamily="34" charset="-120"/>
               </a:rPr>
-              <a:t>법인은 단지 1곳당 연 구독료를, 지자체는 시범사업 용역비를 낼 것이다 (금액은 지출 경험 인터뷰로 검증)</a:t>
+              <a:t>법인 구독 ha당 연 2만 원(50ha 연 100만 원): 거절 1건(1.7ha)을 메워 되찾는 생산비 절감 연 약 300만 원의 3분의 1.</a:t>
+            </a:r>
+            <a:endParaRPr lang="en-US" sz="1150" dirty="0"/>
+          </a:p>
+          <a:p>
+            <a:pPr indent="0" marL="0">
+              <a:buNone/>
+            </a:pPr>
+            <a:r>
+              <a:rPr lang="en-US" sz="1150" dirty="0">
+                <a:solidFill>
+                  <a:schemeClr val="tx1"/>
+                </a:solidFill>
+                <a:latin typeface="Freesentation 4 Regular" pitchFamily="34" charset="0"/>
+                <a:ea typeface="Freesentation 4 Regular" pitchFamily="34" charset="-122"/>
+                <a:cs typeface="Freesentation 4 Regular" pitchFamily="34" charset="-120"/>
+              </a:rPr>
+              <a:t>시범사업 교육·컨설팅 예산으로 단지당 연 1,000만 원 (근거: 국가데이터처 2025년산 논벼 생산비조사, 컨설팅 개소당 3천만 원 사례)</a:t>
             </a:r>
             <a:endParaRPr lang="en-US" sz="1150" dirty="0"/>
           </a:p>

--- a/docs/빈필드시뮬레이터_최종발표.pptx
+++ b/docs/빈필드시뮬레이터_최종발표.pptx
@@ -124,7 +124,7 @@
   <p:extLst>
     <p:ext uri="{521415D9-36F7-43E2-AB2F-B90AF26B5E84}">
       <p14:sectionLst xmlns:p14="http://schemas.microsoft.com/office/powerpoint/2010/main">
-        <p14:section name="개요" id="{be9c3d50-261b-6b18-05f2-c60bdd73a2b1}">
+        <p14:section name="개요" id="{f115be46-e0f0-e9f5-be29-0775a19b2088}">
           <p14:sldIdLst>
             <p14:sldId id="256"/>
             <p14:sldId id="257"/>
@@ -132,13 +132,13 @@
             <p14:sldId id="259"/>
           </p14:sldIdLst>
         </p14:section>
-        <p14:section name="고객 정의" id="{c6f18c84-4416-de9b-04da-fd7a259cb6fb}">
+        <p14:section name="고객 정의" id="{21d5ee10-1ab3-cd61-0cf1-25f52b48e6ff}">
           <p14:sldIdLst>
             <p14:sldId id="260"/>
             <p14:sldId id="261"/>
           </p14:sldIdLst>
         </p14:section>
-        <p14:section name="가치제안 캔버스" id="{3a671c22-9cc1-5a3c-46ed-c2d95b5d3930}">
+        <p14:section name="가치제안 캔버스" id="{bd03e141-5087-c1e2-76ae-4f6775c40aa4}">
           <p14:sldIdLst>
             <p14:sldId id="262"/>
             <p14:sldId id="263"/>
@@ -146,20 +146,20 @@
             <p14:sldId id="265"/>
           </p14:sldIdLst>
         </p14:section>
-        <p14:section name="가설 검증" id="{028fa026-0d1f-987f-e003-c30fca7688ae}">
+        <p14:section name="가설 검증" id="{2f8f1809-62c0-f2f2-45ab-645498c9cb6d}">
           <p14:sldIdLst>
             <p14:sldId id="266"/>
             <p14:sldId id="267"/>
             <p14:sldId id="268"/>
           </p14:sldIdLst>
         </p14:section>
-        <p14:section name="MVP" id="{320324a2-120e-dbfe-c8a3-74f195dc4abd}">
+        <p14:section name="MVP" id="{b854d4b2-f80b-5a66-0e33-154af21322af}">
           <p14:sldIdLst>
             <p14:sldId id="269"/>
             <p14:sldId id="270"/>
           </p14:sldIdLst>
         </p14:section>
-        <p14:section name="비즈니스 모델과 다음 단계" id="{6995cd3a-abb8-98df-1339-a164ba9ead7b}">
+        <p14:section name="비즈니스 모델과 다음 단계" id="{39952ae5-0beb-5e63-779f-4707a403e310}">
           <p14:sldIdLst>
             <p14:sldId id="271"/>
             <p14:sldId id="272"/>
@@ -11340,7 +11340,7 @@
                 <a:ea typeface="Freesentation 4 Regular" pitchFamily="34" charset="-122"/>
                 <a:cs typeface="Freesentation 4 Regular" pitchFamily="34" charset="-120"/>
               </a:rPr>
-              <a:t>지원 기준을 넘기면서 평당 배당이 가장 높은 대안을 최적 1 + 예비 2로 추천</a:t>
+              <a:t>기본 → 구멍·기준 충족 → 구멍·기준 미충족 순서로 대체 필지 추천</a:t>
             </a:r>
             <a:endParaRPr lang="en-US" sz="1300" dirty="0"/>
           </a:p>
@@ -12374,7 +12374,7 @@
               <a:buNone/>
             </a:pPr>
             <a:r>
-              <a:rPr lang="en-US" sz="1150" dirty="0">
+              <a:rPr lang="en-US" sz="1050" dirty="0">
                 <a:solidFill>
                   <a:schemeClr val="tx1"/>
                 </a:solidFill>
@@ -12382,16 +12382,16 @@
                 <a:ea typeface="Freesentation 4 Regular" pitchFamily="34" charset="-122"/>
                 <a:cs typeface="Freesentation 4 Regular" pitchFamily="34" charset="-120"/>
               </a:rPr>
-              <a:t>거절 재계산 엔진 운영과 들녘별 자료 보정을 할 것이다.</a:t>
-            </a:r>
-            <a:endParaRPr lang="en-US" sz="1150" dirty="0"/>
+              <a:t>1  대체 필지 추천: 최소 면적·목표 순수익</a:t>
+            </a:r>
+            <a:endParaRPr lang="en-US" sz="1050" dirty="0"/>
           </a:p>
           <a:p>
             <a:pPr indent="0" marL="0">
               <a:buNone/>
             </a:pPr>
             <a:r>
-              <a:rPr lang="en-US" sz="1150" dirty="0">
+              <a:rPr lang="en-US" sz="1050" dirty="0">
                 <a:solidFill>
                   <a:schemeClr val="tx1"/>
                 </a:solidFill>
@@ -12399,9 +12399,26 @@
                 <a:ea typeface="Freesentation 4 Regular" pitchFamily="34" charset="-122"/>
                 <a:cs typeface="Freesentation 4 Regular" pitchFamily="34" charset="-120"/>
               </a:rPr>
-              <a:t>핵심지표: 재설계 소요일, 기준 충족 단지 수</a:t>
-            </a:r>
-            <a:endParaRPr lang="en-US" sz="1150" dirty="0"/>
+              <a:t>2  기계비 최소 경로, 빼도 되면 그대로 갈 때 배당금</a:t>
+            </a:r>
+            <a:endParaRPr lang="en-US" sz="1050" dirty="0"/>
+          </a:p>
+          <a:p>
+            <a:pPr indent="0" marL="0">
+              <a:buNone/>
+            </a:pPr>
+            <a:r>
+              <a:rPr lang="en-US" sz="1050" dirty="0">
+                <a:solidFill>
+                  <a:schemeClr val="tx1"/>
+                </a:solidFill>
+                <a:latin typeface="Freesentation 4 Regular" pitchFamily="34" charset="0"/>
+                <a:ea typeface="Freesentation 4 Regular" pitchFamily="34" charset="-122"/>
+                <a:cs typeface="Freesentation 4 Regular" pitchFamily="34" charset="-120"/>
+              </a:rPr>
+              <a:t>3  경우별 배당금과 흉년 때 변화</a:t>
+            </a:r>
+            <a:endParaRPr lang="en-US" sz="1050" dirty="0"/>
           </a:p>
         </p:txBody>
       </p:sp>
@@ -12685,6 +12702,80 @@
                 <a:cs typeface="Freesentation 4 Regular" pitchFamily="34" charset="-120"/>
               </a:rPr>
               <a:t>거절 필지가 지원 자격과 평당 배당에 주는 영향을 1초 안에 보여 줘, 대안 결정 기간을 2주에서 1일로 줄일 것이다</a:t>
+            </a:r>
+            <a:endParaRPr lang="en-US" sz="1150" dirty="0"/>
+          </a:p>
+          <a:p>
+            <a:pPr indent="0" marL="0">
+              <a:buNone/>
+            </a:pPr>
+            <a:endParaRPr lang="en-US" sz="1150" dirty="0"/>
+          </a:p>
+          <a:p>
+            <a:pPr indent="0" marL="0">
+              <a:buNone/>
+            </a:pPr>
+            <a:r>
+              <a:rPr lang="en-US" sz="1150" dirty="0">
+                <a:solidFill>
+                  <a:schemeClr val="tx1"/>
+                </a:solidFill>
+                <a:latin typeface="Freesentation 4 Regular" pitchFamily="34" charset="0"/>
+                <a:ea typeface="Freesentation 4 Regular" pitchFamily="34" charset="-122"/>
+                <a:cs typeface="Freesentation 4 Regular" pitchFamily="34" charset="-120"/>
+              </a:rPr>
+              <a:t>후보 제안 3단계</a:t>
+            </a:r>
+            <a:endParaRPr lang="en-US" sz="1150" dirty="0"/>
+          </a:p>
+          <a:p>
+            <a:pPr indent="0" marL="0">
+              <a:buNone/>
+            </a:pPr>
+            <a:r>
+              <a:rPr lang="en-US" sz="1150" dirty="0">
+                <a:solidFill>
+                  <a:schemeClr val="tx1"/>
+                </a:solidFill>
+                <a:latin typeface="Freesentation 4 Regular" pitchFamily="34" charset="0"/>
+                <a:ea typeface="Freesentation 4 Regular" pitchFamily="34" charset="-122"/>
+                <a:cs typeface="Freesentation 4 Regular" pitchFamily="34" charset="-120"/>
+              </a:rPr>
+              <a:t>① 기본: 구멍 없이 필지화</a:t>
+            </a:r>
+            <a:endParaRPr lang="en-US" sz="1150" dirty="0"/>
+          </a:p>
+          <a:p>
+            <a:pPr indent="0" marL="0">
+              <a:buNone/>
+            </a:pPr>
+            <a:r>
+              <a:rPr lang="en-US" sz="1150" dirty="0">
+                <a:solidFill>
+                  <a:schemeClr val="tx1"/>
+                </a:solidFill>
+                <a:latin typeface="Freesentation 4 Regular" pitchFamily="34" charset="0"/>
+                <a:ea typeface="Freesentation 4 Regular" pitchFamily="34" charset="-122"/>
+                <a:cs typeface="Freesentation 4 Regular" pitchFamily="34" charset="-120"/>
+              </a:rPr>
+              <a:t>② 구멍 · 기준 충족</a:t>
+            </a:r>
+            <a:endParaRPr lang="en-US" sz="1150" dirty="0"/>
+          </a:p>
+          <a:p>
+            <a:pPr indent="0" marL="0">
+              <a:buNone/>
+            </a:pPr>
+            <a:r>
+              <a:rPr lang="en-US" sz="1150" dirty="0">
+                <a:solidFill>
+                  <a:schemeClr val="tx1"/>
+                </a:solidFill>
+                <a:latin typeface="Freesentation 4 Regular" pitchFamily="34" charset="0"/>
+                <a:ea typeface="Freesentation 4 Regular" pitchFamily="34" charset="-122"/>
+                <a:cs typeface="Freesentation 4 Regular" pitchFamily="34" charset="-120"/>
+              </a:rPr>
+              <a:t>③ 구멍 · 기준 미충족</a:t>
             </a:r>
             <a:endParaRPr lang="en-US" sz="1150" dirty="0"/>
           </a:p>
@@ -24395,7 +24486,7 @@
                           <a:ea typeface="Freesentation 4 Regular" pitchFamily="34" charset="-122"/>
                           <a:cs typeface="Freesentation 4 Regular" pitchFamily="34" charset="-120"/>
                         </a:rPr>
-                        <a:t>단지 경계 300m 안의 대체 필지와 경작권 교환 후보를 자동으로 찾아 최적 1 + 예비 2만 답사하게 한다</a:t>
+                        <a:t>단지 경계 300m 안의 대체 필지와 경작권 교환 후보를 찾아 기본 → 구멍·기준 충족 → 구멍·기준 미충족 순서로 제안한다</a:t>
                       </a:r>
                       <a:endParaRPr lang="en-US" sz="1300" dirty="0">
                         <a:latin typeface="Freesentation 4 Regular" charset="0"/>
@@ -25217,7 +25308,7 @@
                           <a:ea typeface="Freesentation 4 Regular" pitchFamily="34" charset="-122"/>
                           <a:cs typeface="Freesentation 4 Regular" pitchFamily="34" charset="-120"/>
                         </a:rPr>
-                        <a:t>예비 후보 2개를 미리 정해, 또 거절돼도 바로 다음 설득으로 넘어간다</a:t>
+                        <a:t>기준 충족 여부에 맞는 후보를 바로 보여 줘, 거절 당일 다음 설득으로 넘어간다</a:t>
                       </a:r>
                       <a:endParaRPr lang="en-US" sz="1300" dirty="0">
                         <a:latin typeface="Freesentation 4 Regular" charset="0"/>
@@ -25285,7 +25376,7 @@
                           <a:ea typeface="Freesentation 5 Medium" pitchFamily="34" charset="-122"/>
                           <a:cs typeface="Freesentation 5 Medium" pitchFamily="34" charset="-120"/>
                         </a:rPr>
-                        <a:t>최적 1 + 예비 2</a:t>
+                        <a:t>3단계 후보 제안</a:t>
                       </a:r>
                       <a:endParaRPr lang="en-US" sz="1300" dirty="0">
                         <a:latin typeface="Freesentation 5 Medium" charset="0"/>
